--- a/Lecture Resources/Lecture Powerpoints/Chunk 7 - Imports.pptx
+++ b/Lecture Resources/Lecture Powerpoints/Chunk 7 - Imports.pptx
@@ -132,6 +132,99 @@
 
 <file path=ppt/changesInfos/changesInfo1.xml><?xml version="1.0" encoding="utf-8"?>
 <pc:chgInfo xmlns:a="http://schemas.openxmlformats.org/drawingml/2006/main" xmlns:r="http://schemas.openxmlformats.org/officeDocument/2006/relationships" xmlns:ac="http://schemas.microsoft.com/office/drawing/2013/main/command" xmlns:pc="http://schemas.microsoft.com/office/powerpoint/2013/main/command">
+  <pc:docChgLst>
+    <pc:chgData name="Jonathan Bollig" userId="8b5d0afe-f106-45e0-8c3f-fd98fa124db1" providerId="ADAL" clId="{891409C9-2319-433B-8001-2E1CE368518E}"/>
+    <pc:docChg chg="custSel addSld delSld modSld">
+      <pc:chgData name="Jonathan Bollig" userId="8b5d0afe-f106-45e0-8c3f-fd98fa124db1" providerId="ADAL" clId="{891409C9-2319-433B-8001-2E1CE368518E}" dt="2025-08-18T13:33:56.347" v="46" actId="47"/>
+      <pc:docMkLst>
+        <pc:docMk/>
+      </pc:docMkLst>
+      <pc:sldChg chg="modSp mod">
+        <pc:chgData name="Jonathan Bollig" userId="8b5d0afe-f106-45e0-8c3f-fd98fa124db1" providerId="ADAL" clId="{891409C9-2319-433B-8001-2E1CE368518E}" dt="2025-08-18T10:03:07.320" v="7" actId="20577"/>
+        <pc:sldMkLst>
+          <pc:docMk/>
+          <pc:sldMk cId="836289018" sldId="256"/>
+        </pc:sldMkLst>
+      </pc:sldChg>
+      <pc:sldChg chg="del">
+        <pc:chgData name="Jonathan Bollig" userId="8b5d0afe-f106-45e0-8c3f-fd98fa124db1" providerId="ADAL" clId="{891409C9-2319-433B-8001-2E1CE368518E}" dt="2025-08-18T09:57:07.527" v="0" actId="47"/>
+        <pc:sldMkLst>
+          <pc:docMk/>
+          <pc:sldMk cId="3656329933" sldId="257"/>
+        </pc:sldMkLst>
+      </pc:sldChg>
+      <pc:sldChg chg="del">
+        <pc:chgData name="Jonathan Bollig" userId="8b5d0afe-f106-45e0-8c3f-fd98fa124db1" providerId="ADAL" clId="{891409C9-2319-433B-8001-2E1CE368518E}" dt="2025-08-18T09:57:07.527" v="0" actId="47"/>
+        <pc:sldMkLst>
+          <pc:docMk/>
+          <pc:sldMk cId="544279955" sldId="258"/>
+        </pc:sldMkLst>
+      </pc:sldChg>
+      <pc:sldChg chg="delSp modSp del mod">
+        <pc:chgData name="Jonathan Bollig" userId="8b5d0afe-f106-45e0-8c3f-fd98fa124db1" providerId="ADAL" clId="{891409C9-2319-433B-8001-2E1CE368518E}" dt="2025-08-18T13:33:56.347" v="46" actId="47"/>
+        <pc:sldMkLst>
+          <pc:docMk/>
+          <pc:sldMk cId="2169503629" sldId="259"/>
+        </pc:sldMkLst>
+      </pc:sldChg>
+      <pc:sldChg chg="add">
+        <pc:chgData name="Jonathan Bollig" userId="8b5d0afe-f106-45e0-8c3f-fd98fa124db1" providerId="ADAL" clId="{891409C9-2319-433B-8001-2E1CE368518E}" dt="2025-08-18T13:33:54.473" v="45"/>
+        <pc:sldMkLst>
+          <pc:docMk/>
+          <pc:sldMk cId="932306145" sldId="260"/>
+        </pc:sldMkLst>
+      </pc:sldChg>
+      <pc:sldChg chg="del">
+        <pc:chgData name="Jonathan Bollig" userId="8b5d0afe-f106-45e0-8c3f-fd98fa124db1" providerId="ADAL" clId="{891409C9-2319-433B-8001-2E1CE368518E}" dt="2025-08-18T09:57:07.527" v="0" actId="47"/>
+        <pc:sldMkLst>
+          <pc:docMk/>
+          <pc:sldMk cId="2533283895" sldId="260"/>
+        </pc:sldMkLst>
+      </pc:sldChg>
+      <pc:sldChg chg="del">
+        <pc:chgData name="Jonathan Bollig" userId="8b5d0afe-f106-45e0-8c3f-fd98fa124db1" providerId="ADAL" clId="{891409C9-2319-433B-8001-2E1CE368518E}" dt="2025-08-18T09:57:07.527" v="0" actId="47"/>
+        <pc:sldMkLst>
+          <pc:docMk/>
+          <pc:sldMk cId="847849653" sldId="261"/>
+        </pc:sldMkLst>
+      </pc:sldChg>
+      <pc:sldChg chg="del">
+        <pc:chgData name="Jonathan Bollig" userId="8b5d0afe-f106-45e0-8c3f-fd98fa124db1" providerId="ADAL" clId="{891409C9-2319-433B-8001-2E1CE368518E}" dt="2025-08-18T09:57:07.527" v="0" actId="47"/>
+        <pc:sldMkLst>
+          <pc:docMk/>
+          <pc:sldMk cId="1908144578" sldId="262"/>
+        </pc:sldMkLst>
+      </pc:sldChg>
+      <pc:sldChg chg="del">
+        <pc:chgData name="Jonathan Bollig" userId="8b5d0afe-f106-45e0-8c3f-fd98fa124db1" providerId="ADAL" clId="{891409C9-2319-433B-8001-2E1CE368518E}" dt="2025-08-18T09:57:07.527" v="0" actId="47"/>
+        <pc:sldMkLst>
+          <pc:docMk/>
+          <pc:sldMk cId="4076698392" sldId="263"/>
+        </pc:sldMkLst>
+      </pc:sldChg>
+      <pc:sldChg chg="del">
+        <pc:chgData name="Jonathan Bollig" userId="8b5d0afe-f106-45e0-8c3f-fd98fa124db1" providerId="ADAL" clId="{891409C9-2319-433B-8001-2E1CE368518E}" dt="2025-08-18T09:57:07.527" v="0" actId="47"/>
+        <pc:sldMkLst>
+          <pc:docMk/>
+          <pc:sldMk cId="3708449378" sldId="264"/>
+        </pc:sldMkLst>
+      </pc:sldChg>
+      <pc:sldChg chg="del">
+        <pc:chgData name="Jonathan Bollig" userId="8b5d0afe-f106-45e0-8c3f-fd98fa124db1" providerId="ADAL" clId="{891409C9-2319-433B-8001-2E1CE368518E}" dt="2025-08-18T09:57:07.527" v="0" actId="47"/>
+        <pc:sldMkLst>
+          <pc:docMk/>
+          <pc:sldMk cId="933916611" sldId="265"/>
+        </pc:sldMkLst>
+      </pc:sldChg>
+      <pc:sldChg chg="del">
+        <pc:chgData name="Jonathan Bollig" userId="8b5d0afe-f106-45e0-8c3f-fd98fa124db1" providerId="ADAL" clId="{891409C9-2319-433B-8001-2E1CE368518E}" dt="2025-08-18T09:57:07.527" v="0" actId="47"/>
+        <pc:sldMkLst>
+          <pc:docMk/>
+          <pc:sldMk cId="2117799034" sldId="266"/>
+        </pc:sldMkLst>
+      </pc:sldChg>
+    </pc:docChg>
+  </pc:docChgLst>
   <pc:docChgLst>
     <pc:chgData name="Jonathan Bollig" userId="8b5d0afe-f106-45e0-8c3f-fd98fa124db1" providerId="ADAL" clId="{B108959E-8160-4214-BA0D-42D2F1070C03}"/>
     <pc:docChg chg="undo custSel addSld modSld sldOrd">
@@ -607,99 +700,6 @@
       </pc:sldChg>
     </pc:docChg>
   </pc:docChgLst>
-  <pc:docChgLst>
-    <pc:chgData name="Jonathan Bollig" userId="8b5d0afe-f106-45e0-8c3f-fd98fa124db1" providerId="ADAL" clId="{891409C9-2319-433B-8001-2E1CE368518E}"/>
-    <pc:docChg chg="custSel addSld delSld modSld">
-      <pc:chgData name="Jonathan Bollig" userId="8b5d0afe-f106-45e0-8c3f-fd98fa124db1" providerId="ADAL" clId="{891409C9-2319-433B-8001-2E1CE368518E}" dt="2025-08-18T13:33:56.347" v="46" actId="47"/>
-      <pc:docMkLst>
-        <pc:docMk/>
-      </pc:docMkLst>
-      <pc:sldChg chg="modSp mod">
-        <pc:chgData name="Jonathan Bollig" userId="8b5d0afe-f106-45e0-8c3f-fd98fa124db1" providerId="ADAL" clId="{891409C9-2319-433B-8001-2E1CE368518E}" dt="2025-08-18T10:03:07.320" v="7" actId="20577"/>
-        <pc:sldMkLst>
-          <pc:docMk/>
-          <pc:sldMk cId="836289018" sldId="256"/>
-        </pc:sldMkLst>
-      </pc:sldChg>
-      <pc:sldChg chg="del">
-        <pc:chgData name="Jonathan Bollig" userId="8b5d0afe-f106-45e0-8c3f-fd98fa124db1" providerId="ADAL" clId="{891409C9-2319-433B-8001-2E1CE368518E}" dt="2025-08-18T09:57:07.527" v="0" actId="47"/>
-        <pc:sldMkLst>
-          <pc:docMk/>
-          <pc:sldMk cId="3656329933" sldId="257"/>
-        </pc:sldMkLst>
-      </pc:sldChg>
-      <pc:sldChg chg="del">
-        <pc:chgData name="Jonathan Bollig" userId="8b5d0afe-f106-45e0-8c3f-fd98fa124db1" providerId="ADAL" clId="{891409C9-2319-433B-8001-2E1CE368518E}" dt="2025-08-18T09:57:07.527" v="0" actId="47"/>
-        <pc:sldMkLst>
-          <pc:docMk/>
-          <pc:sldMk cId="544279955" sldId="258"/>
-        </pc:sldMkLst>
-      </pc:sldChg>
-      <pc:sldChg chg="delSp modSp del mod">
-        <pc:chgData name="Jonathan Bollig" userId="8b5d0afe-f106-45e0-8c3f-fd98fa124db1" providerId="ADAL" clId="{891409C9-2319-433B-8001-2E1CE368518E}" dt="2025-08-18T13:33:56.347" v="46" actId="47"/>
-        <pc:sldMkLst>
-          <pc:docMk/>
-          <pc:sldMk cId="2169503629" sldId="259"/>
-        </pc:sldMkLst>
-      </pc:sldChg>
-      <pc:sldChg chg="add">
-        <pc:chgData name="Jonathan Bollig" userId="8b5d0afe-f106-45e0-8c3f-fd98fa124db1" providerId="ADAL" clId="{891409C9-2319-433B-8001-2E1CE368518E}" dt="2025-08-18T13:33:54.473" v="45"/>
-        <pc:sldMkLst>
-          <pc:docMk/>
-          <pc:sldMk cId="932306145" sldId="260"/>
-        </pc:sldMkLst>
-      </pc:sldChg>
-      <pc:sldChg chg="del">
-        <pc:chgData name="Jonathan Bollig" userId="8b5d0afe-f106-45e0-8c3f-fd98fa124db1" providerId="ADAL" clId="{891409C9-2319-433B-8001-2E1CE368518E}" dt="2025-08-18T09:57:07.527" v="0" actId="47"/>
-        <pc:sldMkLst>
-          <pc:docMk/>
-          <pc:sldMk cId="2533283895" sldId="260"/>
-        </pc:sldMkLst>
-      </pc:sldChg>
-      <pc:sldChg chg="del">
-        <pc:chgData name="Jonathan Bollig" userId="8b5d0afe-f106-45e0-8c3f-fd98fa124db1" providerId="ADAL" clId="{891409C9-2319-433B-8001-2E1CE368518E}" dt="2025-08-18T09:57:07.527" v="0" actId="47"/>
-        <pc:sldMkLst>
-          <pc:docMk/>
-          <pc:sldMk cId="847849653" sldId="261"/>
-        </pc:sldMkLst>
-      </pc:sldChg>
-      <pc:sldChg chg="del">
-        <pc:chgData name="Jonathan Bollig" userId="8b5d0afe-f106-45e0-8c3f-fd98fa124db1" providerId="ADAL" clId="{891409C9-2319-433B-8001-2E1CE368518E}" dt="2025-08-18T09:57:07.527" v="0" actId="47"/>
-        <pc:sldMkLst>
-          <pc:docMk/>
-          <pc:sldMk cId="1908144578" sldId="262"/>
-        </pc:sldMkLst>
-      </pc:sldChg>
-      <pc:sldChg chg="del">
-        <pc:chgData name="Jonathan Bollig" userId="8b5d0afe-f106-45e0-8c3f-fd98fa124db1" providerId="ADAL" clId="{891409C9-2319-433B-8001-2E1CE368518E}" dt="2025-08-18T09:57:07.527" v="0" actId="47"/>
-        <pc:sldMkLst>
-          <pc:docMk/>
-          <pc:sldMk cId="4076698392" sldId="263"/>
-        </pc:sldMkLst>
-      </pc:sldChg>
-      <pc:sldChg chg="del">
-        <pc:chgData name="Jonathan Bollig" userId="8b5d0afe-f106-45e0-8c3f-fd98fa124db1" providerId="ADAL" clId="{891409C9-2319-433B-8001-2E1CE368518E}" dt="2025-08-18T09:57:07.527" v="0" actId="47"/>
-        <pc:sldMkLst>
-          <pc:docMk/>
-          <pc:sldMk cId="3708449378" sldId="264"/>
-        </pc:sldMkLst>
-      </pc:sldChg>
-      <pc:sldChg chg="del">
-        <pc:chgData name="Jonathan Bollig" userId="8b5d0afe-f106-45e0-8c3f-fd98fa124db1" providerId="ADAL" clId="{891409C9-2319-433B-8001-2E1CE368518E}" dt="2025-08-18T09:57:07.527" v="0" actId="47"/>
-        <pc:sldMkLst>
-          <pc:docMk/>
-          <pc:sldMk cId="933916611" sldId="265"/>
-        </pc:sldMkLst>
-      </pc:sldChg>
-      <pc:sldChg chg="del">
-        <pc:chgData name="Jonathan Bollig" userId="8b5d0afe-f106-45e0-8c3f-fd98fa124db1" providerId="ADAL" clId="{891409C9-2319-433B-8001-2E1CE368518E}" dt="2025-08-18T09:57:07.527" v="0" actId="47"/>
-        <pc:sldMkLst>
-          <pc:docMk/>
-          <pc:sldMk cId="2117799034" sldId="266"/>
-        </pc:sldMkLst>
-      </pc:sldChg>
-    </pc:docChg>
-  </pc:docChgLst>
 </pc:chgInfo>
 </file>
 
@@ -785,7 +785,7 @@
           <a:p>
             <a:fld id="{0B6CA2EE-5589-4682-AD7F-744DBF1E81F5}" type="datetimeFigureOut">
               <a:rPr lang="de-DE" smtClean="0"/>
-              <a:t>07.10.2025</a:t>
+              <a:t>08.10.2025</a:t>
             </a:fld>
             <a:endParaRPr lang="de-DE"/>
           </a:p>
@@ -943,7 +943,7 @@
           <a:p>
             <a:fld id="{11422C3B-6429-4381-8F08-B422F3CD22BF}" type="slidenum">
               <a:rPr lang="de-DE" smtClean="0"/>
-              <a:t>‹Nr.›</a:t>
+              <a:t>‹#›</a:t>
             </a:fld>
             <a:endParaRPr lang="de-DE"/>
           </a:p>
@@ -1457,7 +1457,7 @@
           <a:p>
             <a:fld id="{ADA51F25-4808-47F4-BF6E-BCDC230DB01C}" type="datetimeFigureOut">
               <a:rPr lang="de-DE" smtClean="0"/>
-              <a:t>07.10.2025</a:t>
+              <a:t>08.10.2025</a:t>
             </a:fld>
             <a:endParaRPr lang="de-DE"/>
           </a:p>
@@ -1511,7 +1511,7 @@
           <a:p>
             <a:fld id="{C018A060-D51C-4243-8F88-61D66D5570B8}" type="slidenum">
               <a:rPr lang="de-DE" smtClean="0"/>
-              <a:t>‹Nr.›</a:t>
+              <a:t>‹#›</a:t>
             </a:fld>
             <a:endParaRPr lang="de-DE"/>
           </a:p>
@@ -1655,7 +1655,7 @@
           <a:p>
             <a:fld id="{ADA51F25-4808-47F4-BF6E-BCDC230DB01C}" type="datetimeFigureOut">
               <a:rPr lang="de-DE" smtClean="0"/>
-              <a:t>07.10.2025</a:t>
+              <a:t>08.10.2025</a:t>
             </a:fld>
             <a:endParaRPr lang="de-DE"/>
           </a:p>
@@ -1709,7 +1709,7 @@
           <a:p>
             <a:fld id="{C018A060-D51C-4243-8F88-61D66D5570B8}" type="slidenum">
               <a:rPr lang="de-DE" smtClean="0"/>
-              <a:t>‹Nr.›</a:t>
+              <a:t>‹#›</a:t>
             </a:fld>
             <a:endParaRPr lang="de-DE"/>
           </a:p>
@@ -1863,7 +1863,7 @@
           <a:p>
             <a:fld id="{ADA51F25-4808-47F4-BF6E-BCDC230DB01C}" type="datetimeFigureOut">
               <a:rPr lang="de-DE" smtClean="0"/>
-              <a:t>07.10.2025</a:t>
+              <a:t>08.10.2025</a:t>
             </a:fld>
             <a:endParaRPr lang="de-DE"/>
           </a:p>
@@ -1917,7 +1917,7 @@
           <a:p>
             <a:fld id="{C018A060-D51C-4243-8F88-61D66D5570B8}" type="slidenum">
               <a:rPr lang="de-DE" smtClean="0"/>
-              <a:t>‹Nr.›</a:t>
+              <a:t>‹#›</a:t>
             </a:fld>
             <a:endParaRPr lang="de-DE"/>
           </a:p>
@@ -2061,7 +2061,7 @@
           <a:p>
             <a:fld id="{ADA51F25-4808-47F4-BF6E-BCDC230DB01C}" type="datetimeFigureOut">
               <a:rPr lang="de-DE" smtClean="0"/>
-              <a:t>07.10.2025</a:t>
+              <a:t>08.10.2025</a:t>
             </a:fld>
             <a:endParaRPr lang="de-DE"/>
           </a:p>
@@ -2115,7 +2115,7 @@
           <a:p>
             <a:fld id="{C018A060-D51C-4243-8F88-61D66D5570B8}" type="slidenum">
               <a:rPr lang="de-DE" smtClean="0"/>
-              <a:t>‹Nr.›</a:t>
+              <a:t>‹#›</a:t>
             </a:fld>
             <a:endParaRPr lang="de-DE"/>
           </a:p>
@@ -2336,7 +2336,7 @@
           <a:p>
             <a:fld id="{ADA51F25-4808-47F4-BF6E-BCDC230DB01C}" type="datetimeFigureOut">
               <a:rPr lang="de-DE" smtClean="0"/>
-              <a:t>07.10.2025</a:t>
+              <a:t>08.10.2025</a:t>
             </a:fld>
             <a:endParaRPr lang="de-DE"/>
           </a:p>
@@ -2390,7 +2390,7 @@
           <a:p>
             <a:fld id="{C018A060-D51C-4243-8F88-61D66D5570B8}" type="slidenum">
               <a:rPr lang="de-DE" smtClean="0"/>
-              <a:t>‹Nr.›</a:t>
+              <a:t>‹#›</a:t>
             </a:fld>
             <a:endParaRPr lang="de-DE"/>
           </a:p>
@@ -2601,7 +2601,7 @@
           <a:p>
             <a:fld id="{ADA51F25-4808-47F4-BF6E-BCDC230DB01C}" type="datetimeFigureOut">
               <a:rPr lang="de-DE" smtClean="0"/>
-              <a:t>07.10.2025</a:t>
+              <a:t>08.10.2025</a:t>
             </a:fld>
             <a:endParaRPr lang="de-DE"/>
           </a:p>
@@ -2655,7 +2655,7 @@
           <a:p>
             <a:fld id="{C018A060-D51C-4243-8F88-61D66D5570B8}" type="slidenum">
               <a:rPr lang="de-DE" smtClean="0"/>
-              <a:t>‹Nr.›</a:t>
+              <a:t>‹#›</a:t>
             </a:fld>
             <a:endParaRPr lang="de-DE"/>
           </a:p>
@@ -3013,7 +3013,7 @@
           <a:p>
             <a:fld id="{ADA51F25-4808-47F4-BF6E-BCDC230DB01C}" type="datetimeFigureOut">
               <a:rPr lang="de-DE" smtClean="0"/>
-              <a:t>07.10.2025</a:t>
+              <a:t>08.10.2025</a:t>
             </a:fld>
             <a:endParaRPr lang="de-DE"/>
           </a:p>
@@ -3067,7 +3067,7 @@
           <a:p>
             <a:fld id="{C018A060-D51C-4243-8F88-61D66D5570B8}" type="slidenum">
               <a:rPr lang="de-DE" smtClean="0"/>
-              <a:t>‹Nr.›</a:t>
+              <a:t>‹#›</a:t>
             </a:fld>
             <a:endParaRPr lang="de-DE"/>
           </a:p>
@@ -3154,7 +3154,7 @@
           <a:p>
             <a:fld id="{ADA51F25-4808-47F4-BF6E-BCDC230DB01C}" type="datetimeFigureOut">
               <a:rPr lang="de-DE" smtClean="0"/>
-              <a:t>07.10.2025</a:t>
+              <a:t>08.10.2025</a:t>
             </a:fld>
             <a:endParaRPr lang="de-DE"/>
           </a:p>
@@ -3208,7 +3208,7 @@
           <a:p>
             <a:fld id="{C018A060-D51C-4243-8F88-61D66D5570B8}" type="slidenum">
               <a:rPr lang="de-DE" smtClean="0"/>
-              <a:t>‹Nr.›</a:t>
+              <a:t>‹#›</a:t>
             </a:fld>
             <a:endParaRPr lang="de-DE"/>
           </a:p>
@@ -3267,7 +3267,7 @@
           <a:p>
             <a:fld id="{ADA51F25-4808-47F4-BF6E-BCDC230DB01C}" type="datetimeFigureOut">
               <a:rPr lang="de-DE" smtClean="0"/>
-              <a:t>07.10.2025</a:t>
+              <a:t>08.10.2025</a:t>
             </a:fld>
             <a:endParaRPr lang="de-DE"/>
           </a:p>
@@ -3321,7 +3321,7 @@
           <a:p>
             <a:fld id="{C018A060-D51C-4243-8F88-61D66D5570B8}" type="slidenum">
               <a:rPr lang="de-DE" smtClean="0"/>
-              <a:t>‹Nr.›</a:t>
+              <a:t>‹#›</a:t>
             </a:fld>
             <a:endParaRPr lang="de-DE"/>
           </a:p>
@@ -3578,7 +3578,7 @@
           <a:p>
             <a:fld id="{ADA51F25-4808-47F4-BF6E-BCDC230DB01C}" type="datetimeFigureOut">
               <a:rPr lang="de-DE" smtClean="0"/>
-              <a:t>07.10.2025</a:t>
+              <a:t>08.10.2025</a:t>
             </a:fld>
             <a:endParaRPr lang="de-DE"/>
           </a:p>
@@ -3632,7 +3632,7 @@
           <a:p>
             <a:fld id="{C018A060-D51C-4243-8F88-61D66D5570B8}" type="slidenum">
               <a:rPr lang="de-DE" smtClean="0"/>
-              <a:t>‹Nr.›</a:t>
+              <a:t>‹#›</a:t>
             </a:fld>
             <a:endParaRPr lang="de-DE"/>
           </a:p>
@@ -3866,7 +3866,7 @@
           <a:p>
             <a:fld id="{ADA51F25-4808-47F4-BF6E-BCDC230DB01C}" type="datetimeFigureOut">
               <a:rPr lang="de-DE" smtClean="0"/>
-              <a:t>07.10.2025</a:t>
+              <a:t>08.10.2025</a:t>
             </a:fld>
             <a:endParaRPr lang="de-DE"/>
           </a:p>
@@ -3920,7 +3920,7 @@
           <a:p>
             <a:fld id="{C018A060-D51C-4243-8F88-61D66D5570B8}" type="slidenum">
               <a:rPr lang="de-DE" smtClean="0"/>
-              <a:t>‹Nr.›</a:t>
+              <a:t>‹#›</a:t>
             </a:fld>
             <a:endParaRPr lang="de-DE"/>
           </a:p>
@@ -4107,7 +4107,7 @@
           <a:p>
             <a:fld id="{ADA51F25-4808-47F4-BF6E-BCDC230DB01C}" type="datetimeFigureOut">
               <a:rPr lang="de-DE" smtClean="0"/>
-              <a:t>07.10.2025</a:t>
+              <a:t>08.10.2025</a:t>
             </a:fld>
             <a:endParaRPr lang="de-DE"/>
           </a:p>
@@ -4197,7 +4197,7 @@
           <a:p>
             <a:fld id="{C018A060-D51C-4243-8F88-61D66D5570B8}" type="slidenum">
               <a:rPr lang="de-DE" smtClean="0"/>
-              <a:t>‹Nr.›</a:t>
+              <a:t>‹#›</a:t>
             </a:fld>
             <a:endParaRPr lang="de-DE"/>
           </a:p>
@@ -4540,7 +4540,12 @@
             <p:ph type="ctrTitle"/>
           </p:nvPr>
         </p:nvSpPr>
-        <p:spPr/>
+        <p:spPr>
+          <a:xfrm>
+            <a:off x="1524000" y="1689523"/>
+            <a:ext cx="9144000" cy="2387600"/>
+          </a:xfrm>
+        </p:spPr>
         <p:txBody>
           <a:bodyPr>
             <a:normAutofit fontScale="90000"/>
@@ -4559,15 +4564,14 @@
               <a:t>(And everyone else!)</a:t>
             </a:r>
             <a:br>
+              <a:rPr lang="en-US" dirty="0"/>
+            </a:br>
+            <a:br>
               <a:rPr lang="en-US" noProof="0" dirty="0"/>
             </a:br>
             <a:r>
-              <a:rPr lang="en-US" noProof="0"/>
-              <a:t>Chunk 7: </a:t>
-            </a:r>
-            <a:r>
-              <a:rPr lang="en-US" noProof="0" dirty="0"/>
-              <a:t>Imports</a:t>
+              <a:rPr lang="en-US" b="1" noProof="0" dirty="0"/>
+              <a:t>Chunk 7: Imports</a:t>
             </a:r>
           </a:p>
         </p:txBody>
@@ -4588,7 +4592,12 @@
             <p:ph type="subTitle" idx="1"/>
           </p:nvPr>
         </p:nvSpPr>
-        <p:spPr/>
+        <p:spPr>
+          <a:xfrm>
+            <a:off x="1605023" y="4724782"/>
+            <a:ext cx="9144000" cy="1655762"/>
+          </a:xfrm>
+        </p:spPr>
         <p:txBody>
           <a:bodyPr/>
           <a:lstStyle/>
@@ -4600,10 +4609,9 @@
           </a:p>
           <a:p>
             <a:r>
-              <a:rPr lang="en-US" noProof="0"/>
+              <a:rPr lang="en-US" noProof="0" dirty="0"/>
               <a:t>09.10.2025</a:t>
             </a:r>
-            <a:endParaRPr lang="en-US" noProof="0" dirty="0"/>
           </a:p>
         </p:txBody>
       </p:sp>
@@ -5438,6 +5446,210 @@
   <p:clrMapOvr>
     <a:masterClrMapping/>
   </p:clrMapOvr>
+  <p:timing>
+    <p:tnLst>
+      <p:par>
+        <p:cTn id="1" dur="indefinite" restart="never" nodeType="tmRoot">
+          <p:childTnLst>
+            <p:seq concurrent="1" nextAc="seek">
+              <p:cTn id="2" dur="indefinite" nodeType="mainSeq">
+                <p:childTnLst>
+                  <p:par>
+                    <p:cTn id="3" fill="hold">
+                      <p:stCondLst>
+                        <p:cond delay="indefinite"/>
+                      </p:stCondLst>
+                      <p:childTnLst>
+                        <p:par>
+                          <p:cTn id="4" fill="hold">
+                            <p:stCondLst>
+                              <p:cond delay="0"/>
+                            </p:stCondLst>
+                            <p:childTnLst>
+                              <p:par>
+                                <p:cTn id="5" presetID="1" presetClass="entr" presetSubtype="0" fill="hold" nodeType="clickEffect">
+                                  <p:stCondLst>
+                                    <p:cond delay="0"/>
+                                  </p:stCondLst>
+                                  <p:childTnLst>
+                                    <p:set>
+                                      <p:cBhvr>
+                                        <p:cTn id="6" dur="1" fill="hold">
+                                          <p:stCondLst>
+                                            <p:cond delay="0"/>
+                                          </p:stCondLst>
+                                        </p:cTn>
+                                        <p:tgtEl>
+                                          <p:spTgt spid="3">
+                                            <p:txEl>
+                                              <p:pRg st="1" end="1"/>
+                                            </p:txEl>
+                                          </p:spTgt>
+                                        </p:tgtEl>
+                                        <p:attrNameLst>
+                                          <p:attrName>style.visibility</p:attrName>
+                                        </p:attrNameLst>
+                                      </p:cBhvr>
+                                      <p:to>
+                                        <p:strVal val="visible"/>
+                                      </p:to>
+                                    </p:set>
+                                  </p:childTnLst>
+                                </p:cTn>
+                              </p:par>
+                            </p:childTnLst>
+                          </p:cTn>
+                        </p:par>
+                      </p:childTnLst>
+                    </p:cTn>
+                  </p:par>
+                  <p:par>
+                    <p:cTn id="7" fill="hold">
+                      <p:stCondLst>
+                        <p:cond delay="indefinite"/>
+                      </p:stCondLst>
+                      <p:childTnLst>
+                        <p:par>
+                          <p:cTn id="8" fill="hold">
+                            <p:stCondLst>
+                              <p:cond delay="0"/>
+                            </p:stCondLst>
+                            <p:childTnLst>
+                              <p:par>
+                                <p:cTn id="9" presetID="1" presetClass="entr" presetSubtype="0" fill="hold" nodeType="clickEffect">
+                                  <p:stCondLst>
+                                    <p:cond delay="0"/>
+                                  </p:stCondLst>
+                                  <p:childTnLst>
+                                    <p:set>
+                                      <p:cBhvr>
+                                        <p:cTn id="10" dur="1" fill="hold">
+                                          <p:stCondLst>
+                                            <p:cond delay="0"/>
+                                          </p:stCondLst>
+                                        </p:cTn>
+                                        <p:tgtEl>
+                                          <p:spTgt spid="3">
+                                            <p:txEl>
+                                              <p:pRg st="2" end="2"/>
+                                            </p:txEl>
+                                          </p:spTgt>
+                                        </p:tgtEl>
+                                        <p:attrNameLst>
+                                          <p:attrName>style.visibility</p:attrName>
+                                        </p:attrNameLst>
+                                      </p:cBhvr>
+                                      <p:to>
+                                        <p:strVal val="visible"/>
+                                      </p:to>
+                                    </p:set>
+                                  </p:childTnLst>
+                                </p:cTn>
+                              </p:par>
+                            </p:childTnLst>
+                          </p:cTn>
+                        </p:par>
+                      </p:childTnLst>
+                    </p:cTn>
+                  </p:par>
+                  <p:par>
+                    <p:cTn id="11" fill="hold">
+                      <p:stCondLst>
+                        <p:cond delay="indefinite"/>
+                      </p:stCondLst>
+                      <p:childTnLst>
+                        <p:par>
+                          <p:cTn id="12" fill="hold">
+                            <p:stCondLst>
+                              <p:cond delay="0"/>
+                            </p:stCondLst>
+                            <p:childTnLst>
+                              <p:par>
+                                <p:cTn id="13" presetID="1" presetClass="entr" presetSubtype="0" fill="hold" nodeType="clickEffect">
+                                  <p:stCondLst>
+                                    <p:cond delay="0"/>
+                                  </p:stCondLst>
+                                  <p:childTnLst>
+                                    <p:set>
+                                      <p:cBhvr>
+                                        <p:cTn id="14" dur="1" fill="hold">
+                                          <p:stCondLst>
+                                            <p:cond delay="0"/>
+                                          </p:stCondLst>
+                                        </p:cTn>
+                                        <p:tgtEl>
+                                          <p:spTgt spid="3">
+                                            <p:txEl>
+                                              <p:pRg st="3" end="3"/>
+                                            </p:txEl>
+                                          </p:spTgt>
+                                        </p:tgtEl>
+                                        <p:attrNameLst>
+                                          <p:attrName>style.visibility</p:attrName>
+                                        </p:attrNameLst>
+                                      </p:cBhvr>
+                                      <p:to>
+                                        <p:strVal val="visible"/>
+                                      </p:to>
+                                    </p:set>
+                                  </p:childTnLst>
+                                </p:cTn>
+                              </p:par>
+                              <p:par>
+                                <p:cTn id="15" presetID="1" presetClass="entr" presetSubtype="0" fill="hold" nodeType="withEffect">
+                                  <p:stCondLst>
+                                    <p:cond delay="0"/>
+                                  </p:stCondLst>
+                                  <p:childTnLst>
+                                    <p:set>
+                                      <p:cBhvr>
+                                        <p:cTn id="16" dur="1" fill="hold">
+                                          <p:stCondLst>
+                                            <p:cond delay="0"/>
+                                          </p:stCondLst>
+                                        </p:cTn>
+                                        <p:tgtEl>
+                                          <p:spTgt spid="18"/>
+                                        </p:tgtEl>
+                                        <p:attrNameLst>
+                                          <p:attrName>style.visibility</p:attrName>
+                                        </p:attrNameLst>
+                                      </p:cBhvr>
+                                      <p:to>
+                                        <p:strVal val="visible"/>
+                                      </p:to>
+                                    </p:set>
+                                  </p:childTnLst>
+                                </p:cTn>
+                              </p:par>
+                            </p:childTnLst>
+                          </p:cTn>
+                        </p:par>
+                      </p:childTnLst>
+                    </p:cTn>
+                  </p:par>
+                </p:childTnLst>
+              </p:cTn>
+              <p:prevCondLst>
+                <p:cond evt="onPrev" delay="0">
+                  <p:tgtEl>
+                    <p:sldTgt/>
+                  </p:tgtEl>
+                </p:cond>
+              </p:prevCondLst>
+              <p:nextCondLst>
+                <p:cond evt="onNext" delay="0">
+                  <p:tgtEl>
+                    <p:sldTgt/>
+                  </p:tgtEl>
+                </p:cond>
+              </p:nextCondLst>
+            </p:seq>
+          </p:childTnLst>
+        </p:cTn>
+      </p:par>
+    </p:tnLst>
+  </p:timing>
 </p:sld>
 </file>
 
@@ -5937,6 +6149,319 @@
   <p:clrMapOvr>
     <a:masterClrMapping/>
   </p:clrMapOvr>
+  <p:timing>
+    <p:tnLst>
+      <p:par>
+        <p:cTn id="1" dur="indefinite" restart="never" nodeType="tmRoot">
+          <p:childTnLst>
+            <p:seq concurrent="1" nextAc="seek">
+              <p:cTn id="2" dur="indefinite" nodeType="mainSeq">
+                <p:childTnLst>
+                  <p:par>
+                    <p:cTn id="3" fill="hold">
+                      <p:stCondLst>
+                        <p:cond delay="indefinite"/>
+                      </p:stCondLst>
+                      <p:childTnLst>
+                        <p:par>
+                          <p:cTn id="4" fill="hold">
+                            <p:stCondLst>
+                              <p:cond delay="0"/>
+                            </p:stCondLst>
+                            <p:childTnLst>
+                              <p:par>
+                                <p:cTn id="5" presetID="1" presetClass="entr" presetSubtype="0" fill="hold" nodeType="clickEffect">
+                                  <p:stCondLst>
+                                    <p:cond delay="0"/>
+                                  </p:stCondLst>
+                                  <p:childTnLst>
+                                    <p:set>
+                                      <p:cBhvr>
+                                        <p:cTn id="6" dur="1" fill="hold">
+                                          <p:stCondLst>
+                                            <p:cond delay="0"/>
+                                          </p:stCondLst>
+                                        </p:cTn>
+                                        <p:tgtEl>
+                                          <p:spTgt spid="3">
+                                            <p:txEl>
+                                              <p:pRg st="2" end="2"/>
+                                            </p:txEl>
+                                          </p:spTgt>
+                                        </p:tgtEl>
+                                        <p:attrNameLst>
+                                          <p:attrName>style.visibility</p:attrName>
+                                        </p:attrNameLst>
+                                      </p:cBhvr>
+                                      <p:to>
+                                        <p:strVal val="visible"/>
+                                      </p:to>
+                                    </p:set>
+                                  </p:childTnLst>
+                                </p:cTn>
+                              </p:par>
+                              <p:par>
+                                <p:cTn id="7" presetID="1" presetClass="entr" presetSubtype="0" fill="hold" grpId="0" nodeType="withEffect">
+                                  <p:stCondLst>
+                                    <p:cond delay="0"/>
+                                  </p:stCondLst>
+                                  <p:childTnLst>
+                                    <p:set>
+                                      <p:cBhvr>
+                                        <p:cTn id="8" dur="1" fill="hold">
+                                          <p:stCondLst>
+                                            <p:cond delay="0"/>
+                                          </p:stCondLst>
+                                        </p:cTn>
+                                        <p:tgtEl>
+                                          <p:spTgt spid="6"/>
+                                        </p:tgtEl>
+                                        <p:attrNameLst>
+                                          <p:attrName>style.visibility</p:attrName>
+                                        </p:attrNameLst>
+                                      </p:cBhvr>
+                                      <p:to>
+                                        <p:strVal val="visible"/>
+                                      </p:to>
+                                    </p:set>
+                                  </p:childTnLst>
+                                </p:cTn>
+                              </p:par>
+                              <p:par>
+                                <p:cTn id="9" presetID="1" presetClass="entr" presetSubtype="0" fill="hold" nodeType="withEffect">
+                                  <p:stCondLst>
+                                    <p:cond delay="0"/>
+                                  </p:stCondLst>
+                                  <p:childTnLst>
+                                    <p:set>
+                                      <p:cBhvr>
+                                        <p:cTn id="10" dur="1" fill="hold">
+                                          <p:stCondLst>
+                                            <p:cond delay="0"/>
+                                          </p:stCondLst>
+                                        </p:cTn>
+                                        <p:tgtEl>
+                                          <p:spTgt spid="5"/>
+                                        </p:tgtEl>
+                                        <p:attrNameLst>
+                                          <p:attrName>style.visibility</p:attrName>
+                                        </p:attrNameLst>
+                                      </p:cBhvr>
+                                      <p:to>
+                                        <p:strVal val="visible"/>
+                                      </p:to>
+                                    </p:set>
+                                  </p:childTnLst>
+                                </p:cTn>
+                              </p:par>
+                            </p:childTnLst>
+                          </p:cTn>
+                        </p:par>
+                      </p:childTnLst>
+                    </p:cTn>
+                  </p:par>
+                  <p:par>
+                    <p:cTn id="11" fill="hold">
+                      <p:stCondLst>
+                        <p:cond delay="indefinite"/>
+                      </p:stCondLst>
+                      <p:childTnLst>
+                        <p:par>
+                          <p:cTn id="12" fill="hold">
+                            <p:stCondLst>
+                              <p:cond delay="0"/>
+                            </p:stCondLst>
+                            <p:childTnLst>
+                              <p:par>
+                                <p:cTn id="13" presetID="1" presetClass="entr" presetSubtype="0" fill="hold" nodeType="clickEffect">
+                                  <p:stCondLst>
+                                    <p:cond delay="0"/>
+                                  </p:stCondLst>
+                                  <p:childTnLst>
+                                    <p:set>
+                                      <p:cBhvr>
+                                        <p:cTn id="14" dur="1" fill="hold">
+                                          <p:stCondLst>
+                                            <p:cond delay="0"/>
+                                          </p:stCondLst>
+                                        </p:cTn>
+                                        <p:tgtEl>
+                                          <p:spTgt spid="8"/>
+                                        </p:tgtEl>
+                                        <p:attrNameLst>
+                                          <p:attrName>style.visibility</p:attrName>
+                                        </p:attrNameLst>
+                                      </p:cBhvr>
+                                      <p:to>
+                                        <p:strVal val="visible"/>
+                                      </p:to>
+                                    </p:set>
+                                  </p:childTnLst>
+                                </p:cTn>
+                              </p:par>
+                              <p:par>
+                                <p:cTn id="15" presetID="1" presetClass="entr" presetSubtype="0" fill="hold" grpId="0" nodeType="withEffect">
+                                  <p:stCondLst>
+                                    <p:cond delay="0"/>
+                                  </p:stCondLst>
+                                  <p:childTnLst>
+                                    <p:set>
+                                      <p:cBhvr>
+                                        <p:cTn id="16" dur="1" fill="hold">
+                                          <p:stCondLst>
+                                            <p:cond delay="0"/>
+                                          </p:stCondLst>
+                                        </p:cTn>
+                                        <p:tgtEl>
+                                          <p:spTgt spid="7"/>
+                                        </p:tgtEl>
+                                        <p:attrNameLst>
+                                          <p:attrName>style.visibility</p:attrName>
+                                        </p:attrNameLst>
+                                      </p:cBhvr>
+                                      <p:to>
+                                        <p:strVal val="visible"/>
+                                      </p:to>
+                                    </p:set>
+                                  </p:childTnLst>
+                                </p:cTn>
+                              </p:par>
+                            </p:childTnLst>
+                          </p:cTn>
+                        </p:par>
+                      </p:childTnLst>
+                    </p:cTn>
+                  </p:par>
+                  <p:par>
+                    <p:cTn id="17" fill="hold">
+                      <p:stCondLst>
+                        <p:cond delay="indefinite"/>
+                      </p:stCondLst>
+                      <p:childTnLst>
+                        <p:par>
+                          <p:cTn id="18" fill="hold">
+                            <p:stCondLst>
+                              <p:cond delay="0"/>
+                            </p:stCondLst>
+                            <p:childTnLst>
+                              <p:par>
+                                <p:cTn id="19" presetID="1" presetClass="entr" presetSubtype="0" fill="hold" nodeType="clickEffect">
+                                  <p:stCondLst>
+                                    <p:cond delay="0"/>
+                                  </p:stCondLst>
+                                  <p:childTnLst>
+                                    <p:set>
+                                      <p:cBhvr>
+                                        <p:cTn id="20" dur="1" fill="hold">
+                                          <p:stCondLst>
+                                            <p:cond delay="0"/>
+                                          </p:stCondLst>
+                                        </p:cTn>
+                                        <p:tgtEl>
+                                          <p:spTgt spid="3">
+                                            <p:txEl>
+                                              <p:pRg st="8" end="8"/>
+                                            </p:txEl>
+                                          </p:spTgt>
+                                        </p:tgtEl>
+                                        <p:attrNameLst>
+                                          <p:attrName>style.visibility</p:attrName>
+                                        </p:attrNameLst>
+                                      </p:cBhvr>
+                                      <p:to>
+                                        <p:strVal val="visible"/>
+                                      </p:to>
+                                    </p:set>
+                                  </p:childTnLst>
+                                </p:cTn>
+                              </p:par>
+                              <p:par>
+                                <p:cTn id="21" presetID="1" presetClass="entr" presetSubtype="0" fill="hold" grpId="0" nodeType="withEffect">
+                                  <p:stCondLst>
+                                    <p:cond delay="0"/>
+                                  </p:stCondLst>
+                                  <p:childTnLst>
+                                    <p:set>
+                                      <p:cBhvr>
+                                        <p:cTn id="22" dur="1" fill="hold">
+                                          <p:stCondLst>
+                                            <p:cond delay="0"/>
+                                          </p:stCondLst>
+                                        </p:cTn>
+                                        <p:tgtEl>
+                                          <p:spTgt spid="13"/>
+                                        </p:tgtEl>
+                                        <p:attrNameLst>
+                                          <p:attrName>style.visibility</p:attrName>
+                                        </p:attrNameLst>
+                                      </p:cBhvr>
+                                      <p:to>
+                                        <p:strVal val="visible"/>
+                                      </p:to>
+                                    </p:set>
+                                  </p:childTnLst>
+                                </p:cTn>
+                              </p:par>
+                              <p:par>
+                                <p:cTn id="23" presetID="1" presetClass="entr" presetSubtype="0" fill="hold" nodeType="withEffect">
+                                  <p:stCondLst>
+                                    <p:cond delay="0"/>
+                                  </p:stCondLst>
+                                  <p:childTnLst>
+                                    <p:set>
+                                      <p:cBhvr>
+                                        <p:cTn id="24" dur="1" fill="hold">
+                                          <p:stCondLst>
+                                            <p:cond delay="0"/>
+                                          </p:stCondLst>
+                                        </p:cTn>
+                                        <p:tgtEl>
+                                          <p:spTgt spid="11"/>
+                                        </p:tgtEl>
+                                        <p:attrNameLst>
+                                          <p:attrName>style.visibility</p:attrName>
+                                        </p:attrNameLst>
+                                      </p:cBhvr>
+                                      <p:to>
+                                        <p:strVal val="visible"/>
+                                      </p:to>
+                                    </p:set>
+                                  </p:childTnLst>
+                                </p:cTn>
+                              </p:par>
+                            </p:childTnLst>
+                          </p:cTn>
+                        </p:par>
+                      </p:childTnLst>
+                    </p:cTn>
+                  </p:par>
+                </p:childTnLst>
+              </p:cTn>
+              <p:prevCondLst>
+                <p:cond evt="onPrev" delay="0">
+                  <p:tgtEl>
+                    <p:sldTgt/>
+                  </p:tgtEl>
+                </p:cond>
+              </p:prevCondLst>
+              <p:nextCondLst>
+                <p:cond evt="onNext" delay="0">
+                  <p:tgtEl>
+                    <p:sldTgt/>
+                  </p:tgtEl>
+                </p:cond>
+              </p:nextCondLst>
+            </p:seq>
+          </p:childTnLst>
+        </p:cTn>
+      </p:par>
+    </p:tnLst>
+    <p:bldLst>
+      <p:bldP spid="6" grpId="0" animBg="1"/>
+      <p:bldP spid="7" grpId="0" animBg="1"/>
+      <p:bldP spid="13" grpId="0" animBg="1"/>
+    </p:bldLst>
+  </p:timing>
 </p:sld>
 </file>
 
@@ -6258,6 +6783,134 @@
   <p:clrMapOvr>
     <a:masterClrMapping/>
   </p:clrMapOvr>
+  <p:timing>
+    <p:tnLst>
+      <p:par>
+        <p:cTn id="1" dur="indefinite" restart="never" nodeType="tmRoot">
+          <p:childTnLst>
+            <p:seq concurrent="1" nextAc="seek">
+              <p:cTn id="2" dur="indefinite" nodeType="mainSeq">
+                <p:childTnLst>
+                  <p:par>
+                    <p:cTn id="3" fill="hold">
+                      <p:stCondLst>
+                        <p:cond delay="indefinite"/>
+                      </p:stCondLst>
+                      <p:childTnLst>
+                        <p:par>
+                          <p:cTn id="4" fill="hold">
+                            <p:stCondLst>
+                              <p:cond delay="0"/>
+                            </p:stCondLst>
+                            <p:childTnLst>
+                              <p:par>
+                                <p:cTn id="5" presetID="1" presetClass="entr" presetSubtype="0" fill="hold" nodeType="clickEffect">
+                                  <p:stCondLst>
+                                    <p:cond delay="0"/>
+                                  </p:stCondLst>
+                                  <p:childTnLst>
+                                    <p:set>
+                                      <p:cBhvr>
+                                        <p:cTn id="6" dur="1" fill="hold">
+                                          <p:stCondLst>
+                                            <p:cond delay="0"/>
+                                          </p:stCondLst>
+                                        </p:cTn>
+                                        <p:tgtEl>
+                                          <p:spTgt spid="3">
+                                            <p:txEl>
+                                              <p:pRg st="1" end="1"/>
+                                            </p:txEl>
+                                          </p:spTgt>
+                                        </p:tgtEl>
+                                        <p:attrNameLst>
+                                          <p:attrName>style.visibility</p:attrName>
+                                        </p:attrNameLst>
+                                      </p:cBhvr>
+                                      <p:to>
+                                        <p:strVal val="visible"/>
+                                      </p:to>
+                                    </p:set>
+                                  </p:childTnLst>
+                                </p:cTn>
+                              </p:par>
+                            </p:childTnLst>
+                          </p:cTn>
+                        </p:par>
+                      </p:childTnLst>
+                    </p:cTn>
+                  </p:par>
+                  <p:par>
+                    <p:cTn id="7" fill="hold">
+                      <p:stCondLst>
+                        <p:cond delay="indefinite"/>
+                      </p:stCondLst>
+                      <p:childTnLst>
+                        <p:par>
+                          <p:cTn id="8" fill="hold">
+                            <p:stCondLst>
+                              <p:cond delay="0"/>
+                            </p:stCondLst>
+                            <p:childTnLst>
+                              <p:par>
+                                <p:cTn id="9" presetID="1" presetClass="entr" presetSubtype="0" fill="hold" nodeType="clickEffect">
+                                  <p:stCondLst>
+                                    <p:cond delay="0"/>
+                                  </p:stCondLst>
+                                  <p:childTnLst>
+                                    <p:set>
+                                      <p:cBhvr>
+                                        <p:cTn id="10" dur="1" fill="hold">
+                                          <p:stCondLst>
+                                            <p:cond delay="0"/>
+                                          </p:stCondLst>
+                                        </p:cTn>
+                                        <p:tgtEl>
+                                          <p:spTgt spid="3">
+                                            <p:txEl>
+                                              <p:pRg st="2" end="2"/>
+                                            </p:txEl>
+                                          </p:spTgt>
+                                        </p:tgtEl>
+                                        <p:attrNameLst>
+                                          <p:attrName>style.visibility</p:attrName>
+                                        </p:attrNameLst>
+                                      </p:cBhvr>
+                                      <p:to>
+                                        <p:strVal val="visible"/>
+                                      </p:to>
+                                    </p:set>
+                                  </p:childTnLst>
+                                </p:cTn>
+                              </p:par>
+                            </p:childTnLst>
+                          </p:cTn>
+                        </p:par>
+                      </p:childTnLst>
+                    </p:cTn>
+                  </p:par>
+                </p:childTnLst>
+              </p:cTn>
+              <p:prevCondLst>
+                <p:cond evt="onPrev" delay="0">
+                  <p:tgtEl>
+                    <p:sldTgt/>
+                  </p:tgtEl>
+                </p:cond>
+              </p:prevCondLst>
+              <p:nextCondLst>
+                <p:cond evt="onNext" delay="0">
+                  <p:tgtEl>
+                    <p:sldTgt/>
+                  </p:tgtEl>
+                </p:cond>
+              </p:nextCondLst>
+            </p:seq>
+          </p:childTnLst>
+        </p:cTn>
+      </p:par>
+    </p:tnLst>
+  </p:timing>
 </p:sld>
 </file>
 
@@ -6323,7 +6976,12 @@
             <p:ph idx="1"/>
           </p:nvPr>
         </p:nvSpPr>
-        <p:spPr/>
+        <p:spPr>
+          <a:xfrm>
+            <a:off x="838200" y="2506662"/>
+            <a:ext cx="10515600" cy="4351338"/>
+          </a:xfrm>
+        </p:spPr>
         <p:txBody>
           <a:bodyPr/>
           <a:lstStyle/>
@@ -6332,6 +6990,9 @@
               <a:rPr lang="en-US" dirty="0"/>
               <a:t>Restart kernel:</a:t>
             </a:r>
+          </a:p>
+          <a:p>
+            <a:endParaRPr lang="en-US" dirty="0"/>
           </a:p>
           <a:p>
             <a:endParaRPr lang="en-US" dirty="0"/>
@@ -6370,7 +7031,7 @@
         </p:blipFill>
         <p:spPr>
           <a:xfrm>
-            <a:off x="4181685" y="1482725"/>
+            <a:off x="4655237" y="1991339"/>
             <a:ext cx="5350935" cy="1437661"/>
           </a:xfrm>
           <a:prstGeom prst="rect">
@@ -6402,7 +7063,7 @@
         </p:nvSpPr>
         <p:spPr>
           <a:xfrm>
-            <a:off x="7190481" y="2418588"/>
+            <a:off x="7664033" y="2918531"/>
             <a:ext cx="271023" cy="233560"/>
           </a:xfrm>
           <a:prstGeom prst="rect">
@@ -6464,7 +7125,7 @@
         </p:blipFill>
         <p:spPr>
           <a:xfrm>
-            <a:off x="4331813" y="3276109"/>
+            <a:off x="6096000" y="4358436"/>
             <a:ext cx="2248214" cy="647790"/>
           </a:xfrm>
           <a:prstGeom prst="rect">
@@ -6492,6 +7153,112 @@
   <p:clrMapOvr>
     <a:masterClrMapping/>
   </p:clrMapOvr>
+  <p:timing>
+    <p:tnLst>
+      <p:par>
+        <p:cTn id="1" dur="indefinite" restart="never" nodeType="tmRoot">
+          <p:childTnLst>
+            <p:seq concurrent="1" nextAc="seek">
+              <p:cTn id="2" dur="indefinite" nodeType="mainSeq">
+                <p:childTnLst>
+                  <p:par>
+                    <p:cTn id="3" fill="hold">
+                      <p:stCondLst>
+                        <p:cond delay="indefinite"/>
+                      </p:stCondLst>
+                      <p:childTnLst>
+                        <p:par>
+                          <p:cTn id="4" fill="hold">
+                            <p:stCondLst>
+                              <p:cond delay="0"/>
+                            </p:stCondLst>
+                            <p:childTnLst>
+                              <p:par>
+                                <p:cTn id="5" presetID="1" presetClass="entr" presetSubtype="0" fill="hold" nodeType="clickEffect">
+                                  <p:stCondLst>
+                                    <p:cond delay="0"/>
+                                  </p:stCondLst>
+                                  <p:childTnLst>
+                                    <p:set>
+                                      <p:cBhvr>
+                                        <p:cTn id="6" dur="1" fill="hold">
+                                          <p:stCondLst>
+                                            <p:cond delay="0"/>
+                                          </p:stCondLst>
+                                        </p:cTn>
+                                        <p:tgtEl>
+                                          <p:spTgt spid="3">
+                                            <p:txEl>
+                                              <p:pRg st="4" end="4"/>
+                                            </p:txEl>
+                                          </p:spTgt>
+                                        </p:tgtEl>
+                                        <p:attrNameLst>
+                                          <p:attrName>style.visibility</p:attrName>
+                                        </p:attrNameLst>
+                                      </p:cBhvr>
+                                      <p:to>
+                                        <p:strVal val="visible"/>
+                                      </p:to>
+                                    </p:set>
+                                  </p:childTnLst>
+                                </p:cTn>
+                              </p:par>
+                              <p:par>
+                                <p:cTn id="7" presetID="1" presetClass="entr" presetSubtype="0" fill="hold" nodeType="withEffect">
+                                  <p:stCondLst>
+                                    <p:cond delay="0"/>
+                                  </p:stCondLst>
+                                  <p:childTnLst>
+                                    <p:set>
+                                      <p:cBhvr>
+                                        <p:cTn id="8" dur="1" fill="hold">
+                                          <p:stCondLst>
+                                            <p:cond delay="0"/>
+                                          </p:stCondLst>
+                                        </p:cTn>
+                                        <p:tgtEl>
+                                          <p:spTgt spid="8"/>
+                                        </p:tgtEl>
+                                        <p:attrNameLst>
+                                          <p:attrName>style.visibility</p:attrName>
+                                        </p:attrNameLst>
+                                      </p:cBhvr>
+                                      <p:to>
+                                        <p:strVal val="visible"/>
+                                      </p:to>
+                                    </p:set>
+                                  </p:childTnLst>
+                                </p:cTn>
+                              </p:par>
+                            </p:childTnLst>
+                          </p:cTn>
+                        </p:par>
+                      </p:childTnLst>
+                    </p:cTn>
+                  </p:par>
+                </p:childTnLst>
+              </p:cTn>
+              <p:prevCondLst>
+                <p:cond evt="onPrev" delay="0">
+                  <p:tgtEl>
+                    <p:sldTgt/>
+                  </p:tgtEl>
+                </p:cond>
+              </p:prevCondLst>
+              <p:nextCondLst>
+                <p:cond evt="onNext" delay="0">
+                  <p:tgtEl>
+                    <p:sldTgt/>
+                  </p:tgtEl>
+                </p:cond>
+              </p:nextCondLst>
+            </p:seq>
+          </p:childTnLst>
+        </p:cTn>
+      </p:par>
+    </p:tnLst>
+  </p:timing>
 </p:sld>
 </file>
 
@@ -6530,7 +7297,7 @@
         </p:nvSpPr>
         <p:spPr>
           <a:xfrm>
-            <a:off x="838200" y="1615027"/>
+            <a:off x="838200" y="694332"/>
             <a:ext cx="10515600" cy="1325563"/>
           </a:xfrm>
         </p:spPr>
@@ -6540,16 +7307,16 @@
           <a:p>
             <a:pPr algn="ctr"/>
             <a:r>
-              <a:rPr lang="en-US" dirty="0"/>
+              <a:rPr lang="en-US" b="1" dirty="0"/>
               <a:t>Good Luck with your Tasks </a:t>
             </a:r>
             <a:r>
-              <a:rPr lang="en-US" dirty="0">
+              <a:rPr lang="en-US" b="1" dirty="0">
                 <a:sym typeface="Wingdings" panose="05000000000000000000" pitchFamily="2" charset="2"/>
               </a:rPr>
               <a:t> </a:t>
             </a:r>
-            <a:endParaRPr lang="de-DE" dirty="0"/>
+            <a:endParaRPr lang="de-DE" b="1" dirty="0"/>
           </a:p>
         </p:txBody>
       </p:sp>
@@ -6575,7 +7342,7 @@
         </p:blipFill>
         <p:spPr>
           <a:xfrm>
-            <a:off x="4097573" y="2606395"/>
+            <a:off x="4097573" y="2222959"/>
             <a:ext cx="3996854" cy="3940709"/>
           </a:xfrm>
           <a:prstGeom prst="rect">
@@ -6597,7 +7364,7 @@
         </p:nvSpPr>
         <p:spPr>
           <a:xfrm>
-            <a:off x="4097573" y="6506107"/>
+            <a:off x="4016550" y="6163668"/>
             <a:ext cx="7204793" cy="276999"/>
           </a:xfrm>
           <a:prstGeom prst="rect">
